--- a/ゲーム科1年/01_後期/ゲーム制作実習Ⅰ/バージョン管理/09_ここまでの課題.pptx
+++ b/ゲーム科1年/01_後期/ゲーム制作実習Ⅰ/バージョン管理/09_ここまでの課題.pptx
@@ -5,11 +5,9 @@
     <p:sldMasterId id="2147483648" r:id="rId1"/>
   </p:sldMasterIdLst>
   <p:sldIdLst>
-    <p:sldId id="257" r:id="rId2"/>
-    <p:sldId id="256" r:id="rId3"/>
-    <p:sldId id="258" r:id="rId4"/>
-    <p:sldId id="259" r:id="rId5"/>
-    <p:sldId id="260" r:id="rId6"/>
+    <p:sldId id="258" r:id="rId2"/>
+    <p:sldId id="259" r:id="rId3"/>
+    <p:sldId id="260" r:id="rId4"/>
   </p:sldIdLst>
   <p:sldSz cx="12192000" cy="6858000"/>
   <p:notesSz cx="6858000" cy="9144000"/>
@@ -263,7 +261,7 @@
           <a:p>
             <a:fld id="{E9CC885B-4903-4D54-9A93-00025F12DED9}" type="datetimeFigureOut">
               <a:rPr kumimoji="1" lang="ja-JP" altLang="en-US" smtClean="0"/>
-              <a:t>2025/5/15</a:t>
+              <a:t>2026/1/15</a:t>
             </a:fld>
             <a:endParaRPr kumimoji="1" lang="ja-JP" altLang="en-US"/>
           </a:p>
@@ -493,7 +491,7 @@
           <a:p>
             <a:fld id="{E9CC885B-4903-4D54-9A93-00025F12DED9}" type="datetimeFigureOut">
               <a:rPr kumimoji="1" lang="ja-JP" altLang="en-US" smtClean="0"/>
-              <a:t>2025/5/15</a:t>
+              <a:t>2026/1/15</a:t>
             </a:fld>
             <a:endParaRPr kumimoji="1" lang="ja-JP" altLang="en-US"/>
           </a:p>
@@ -733,7 +731,7 @@
           <a:p>
             <a:fld id="{E9CC885B-4903-4D54-9A93-00025F12DED9}" type="datetimeFigureOut">
               <a:rPr kumimoji="1" lang="ja-JP" altLang="en-US" smtClean="0"/>
-              <a:t>2025/5/15</a:t>
+              <a:t>2026/1/15</a:t>
             </a:fld>
             <a:endParaRPr kumimoji="1" lang="ja-JP" altLang="en-US"/>
           </a:p>
@@ -963,7 +961,7 @@
           <a:p>
             <a:fld id="{E9CC885B-4903-4D54-9A93-00025F12DED9}" type="datetimeFigureOut">
               <a:rPr kumimoji="1" lang="ja-JP" altLang="en-US" smtClean="0"/>
-              <a:t>2025/5/15</a:t>
+              <a:t>2026/1/15</a:t>
             </a:fld>
             <a:endParaRPr kumimoji="1" lang="ja-JP" altLang="en-US"/>
           </a:p>
@@ -1238,7 +1236,7 @@
           <a:p>
             <a:fld id="{E9CC885B-4903-4D54-9A93-00025F12DED9}" type="datetimeFigureOut">
               <a:rPr kumimoji="1" lang="ja-JP" altLang="en-US" smtClean="0"/>
-              <a:t>2025/5/15</a:t>
+              <a:t>2026/1/15</a:t>
             </a:fld>
             <a:endParaRPr kumimoji="1" lang="ja-JP" altLang="en-US"/>
           </a:p>
@@ -1567,7 +1565,7 @@
           <a:p>
             <a:fld id="{E9CC885B-4903-4D54-9A93-00025F12DED9}" type="datetimeFigureOut">
               <a:rPr kumimoji="1" lang="ja-JP" altLang="en-US" smtClean="0"/>
-              <a:t>2025/5/15</a:t>
+              <a:t>2026/1/15</a:t>
             </a:fld>
             <a:endParaRPr kumimoji="1" lang="ja-JP" altLang="en-US"/>
           </a:p>
@@ -2043,7 +2041,7 @@
           <a:p>
             <a:fld id="{E9CC885B-4903-4D54-9A93-00025F12DED9}" type="datetimeFigureOut">
               <a:rPr kumimoji="1" lang="ja-JP" altLang="en-US" smtClean="0"/>
-              <a:t>2025/5/15</a:t>
+              <a:t>2026/1/15</a:t>
             </a:fld>
             <a:endParaRPr kumimoji="1" lang="ja-JP" altLang="en-US"/>
           </a:p>
@@ -2184,7 +2182,7 @@
           <a:p>
             <a:fld id="{E9CC885B-4903-4D54-9A93-00025F12DED9}" type="datetimeFigureOut">
               <a:rPr kumimoji="1" lang="ja-JP" altLang="en-US" smtClean="0"/>
-              <a:t>2025/5/15</a:t>
+              <a:t>2026/1/15</a:t>
             </a:fld>
             <a:endParaRPr kumimoji="1" lang="ja-JP" altLang="en-US"/>
           </a:p>
@@ -2297,7 +2295,7 @@
           <a:p>
             <a:fld id="{E9CC885B-4903-4D54-9A93-00025F12DED9}" type="datetimeFigureOut">
               <a:rPr kumimoji="1" lang="ja-JP" altLang="en-US" smtClean="0"/>
-              <a:t>2025/5/15</a:t>
+              <a:t>2026/1/15</a:t>
             </a:fld>
             <a:endParaRPr kumimoji="1" lang="ja-JP" altLang="en-US"/>
           </a:p>
@@ -2640,7 +2638,7 @@
           <a:p>
             <a:fld id="{E9CC885B-4903-4D54-9A93-00025F12DED9}" type="datetimeFigureOut">
               <a:rPr kumimoji="1" lang="ja-JP" altLang="en-US" smtClean="0"/>
-              <a:t>2025/5/15</a:t>
+              <a:t>2026/1/15</a:t>
             </a:fld>
             <a:endParaRPr kumimoji="1" lang="ja-JP" altLang="en-US"/>
           </a:p>
@@ -2928,7 +2926,7 @@
           <a:p>
             <a:fld id="{E9CC885B-4903-4D54-9A93-00025F12DED9}" type="datetimeFigureOut">
               <a:rPr kumimoji="1" lang="ja-JP" altLang="en-US" smtClean="0"/>
-              <a:t>2025/5/15</a:t>
+              <a:t>2026/1/15</a:t>
             </a:fld>
             <a:endParaRPr kumimoji="1" lang="ja-JP" altLang="en-US"/>
           </a:p>
@@ -3201,7 +3199,7 @@
           <a:p>
             <a:fld id="{E9CC885B-4903-4D54-9A93-00025F12DED9}" type="datetimeFigureOut">
               <a:rPr kumimoji="1" lang="ja-JP" altLang="en-US" smtClean="0"/>
-              <a:t>2025/5/15</a:t>
+              <a:t>2026/1/15</a:t>
             </a:fld>
             <a:endParaRPr kumimoji="1" lang="ja-JP" altLang="en-US"/>
           </a:p>
@@ -3668,7 +3666,7 @@
         <p:spPr>
           <a:xfrm>
             <a:off x="567542" y="1216429"/>
-            <a:ext cx="11146000" cy="4524315"/>
+            <a:ext cx="8693405" cy="3785652"/>
           </a:xfrm>
           <a:prstGeom prst="rect">
             <a:avLst/>
@@ -3683,38 +3681,14 @@
           <a:p>
             <a:r>
               <a:rPr lang="ja-JP" altLang="en-US" sz="2400" dirty="0"/>
-              <a:t>分担してシューティングゲームの</a:t>
-            </a:r>
-            <a:r>
-              <a:rPr lang="en-US" altLang="ja-JP" sz="2400" dirty="0"/>
-              <a:t>Player</a:t>
-            </a:r>
-            <a:r>
-              <a:rPr lang="ja-JP" altLang="en-US" sz="2400" dirty="0"/>
-              <a:t>を作成します。</a:t>
+              <a:t>作業を分担してサンプルの通りのものを作りましょう。</a:t>
             </a:r>
             <a:endParaRPr lang="en-US" altLang="ja-JP" sz="2400" dirty="0"/>
           </a:p>
           <a:p>
             <a:r>
               <a:rPr lang="ja-JP" altLang="en-US" sz="2400" dirty="0"/>
-              <a:t>まずはリーダーが以下の手順で</a:t>
-            </a:r>
-            <a:r>
-              <a:rPr lang="en-US" altLang="ja-JP" sz="2400" dirty="0"/>
-              <a:t>Unity</a:t>
-            </a:r>
-            <a:r>
-              <a:rPr lang="ja-JP" altLang="en-US" sz="2400" dirty="0"/>
-              <a:t>プロジェクトを</a:t>
-            </a:r>
-            <a:r>
-              <a:rPr lang="en-US" altLang="ja-JP" sz="2400" dirty="0"/>
-              <a:t>Push</a:t>
-            </a:r>
-            <a:r>
-              <a:rPr lang="ja-JP" altLang="en-US" sz="2400" dirty="0"/>
-              <a:t>しましょう。</a:t>
+              <a:t>以下はサンプルの説明です。</a:t>
             </a:r>
             <a:endParaRPr lang="en-US" altLang="ja-JP" sz="2400" dirty="0"/>
           </a:p>
@@ -3728,7 +3702,7 @@
                   <a:srgbClr val="FF0000"/>
                 </a:solidFill>
               </a:rPr>
-              <a:t>■手順</a:t>
+              <a:t>■サンプル説明</a:t>
             </a:r>
             <a:endParaRPr lang="en-US" altLang="ja-JP" sz="2400" b="1" dirty="0">
               <a:solidFill>
@@ -3739,192 +3713,74 @@
           <a:p>
             <a:r>
               <a:rPr lang="ja-JP" altLang="en-US" sz="2400" dirty="0"/>
-              <a:t>１．大元のフォルダの中に「</a:t>
+              <a:t>・ゲームを起動するとタイトルシーンが表示される</a:t>
+            </a:r>
+            <a:endParaRPr lang="en-US" altLang="ja-JP" sz="2400" dirty="0"/>
+          </a:p>
+          <a:p>
+            <a:r>
+              <a:rPr lang="ja-JP" altLang="en-US" sz="2400" dirty="0"/>
+              <a:t>・タイトルシーンで</a:t>
             </a:r>
             <a:r>
               <a:rPr lang="en-US" altLang="ja-JP" sz="2400" dirty="0"/>
-              <a:t>09_</a:t>
-            </a:r>
-            <a:r>
-              <a:rPr lang="ja-JP" altLang="en-US" sz="2400" dirty="0"/>
-              <a:t>ここまでの課題」という名前のフォルダを作成</a:t>
+              <a:t>Z</a:t>
+            </a:r>
+            <a:r>
+              <a:rPr lang="ja-JP" altLang="en-US" sz="2400" dirty="0"/>
+              <a:t>キーを押すとプレイシーンに遷移する</a:t>
             </a:r>
             <a:endParaRPr lang="en-US" altLang="ja-JP" sz="2400" dirty="0"/>
           </a:p>
           <a:p>
             <a:r>
               <a:rPr lang="ja-JP" altLang="en-US" sz="2400" dirty="0"/>
-              <a:t>２．１で作ったフォルダの中に</a:t>
+              <a:t>・タイトルシーンで</a:t>
             </a:r>
             <a:r>
               <a:rPr lang="en-US" altLang="ja-JP" sz="2400" dirty="0"/>
-              <a:t>Unity</a:t>
-            </a:r>
-            <a:r>
-              <a:rPr lang="ja-JP" altLang="en-US" sz="2400" dirty="0"/>
-              <a:t>の</a:t>
+              <a:t>X</a:t>
+            </a:r>
+            <a:r>
+              <a:rPr lang="ja-JP" altLang="en-US" sz="2400" dirty="0"/>
+              <a:t>キーを押すとオプション画面に遷移する</a:t>
+            </a:r>
+            <a:endParaRPr lang="en-US" altLang="ja-JP" sz="2400" dirty="0"/>
+          </a:p>
+          <a:p>
+            <a:r>
+              <a:rPr lang="ja-JP" altLang="en-US" sz="2400" dirty="0"/>
+              <a:t>・プレイ</a:t>
             </a:r>
             <a:r>
               <a:rPr lang="en-US" altLang="ja-JP" sz="2400" dirty="0"/>
-              <a:t>3D</a:t>
-            </a:r>
-            <a:r>
-              <a:rPr lang="ja-JP" altLang="en-US" sz="2400" dirty="0"/>
-              <a:t>プロジェクトを作成</a:t>
+              <a:t>/</a:t>
+            </a:r>
+            <a:r>
+              <a:rPr lang="ja-JP" altLang="en-US" sz="2400" dirty="0"/>
+              <a:t>タイトルシーンで</a:t>
+            </a:r>
+            <a:r>
+              <a:rPr lang="en-US" altLang="ja-JP" sz="2400" dirty="0"/>
+              <a:t>C</a:t>
+            </a:r>
+            <a:r>
+              <a:rPr lang="ja-JP" altLang="en-US" sz="2400" dirty="0"/>
+              <a:t>キーを押すとタイトルに戻る</a:t>
             </a:r>
             <a:endParaRPr lang="en-US" altLang="ja-JP" sz="2400" dirty="0"/>
           </a:p>
           <a:p>
-            <a:r>
-              <a:rPr lang="ja-JP" altLang="en-US" sz="2400" dirty="0"/>
-              <a:t>３．</a:t>
-            </a:r>
+            <a:endParaRPr lang="en-US" altLang="ja-JP" sz="2400" dirty="0"/>
+          </a:p>
+          <a:p>
             <a:r>
               <a:rPr lang="en-US" altLang="ja-JP" sz="2400" dirty="0"/>
-              <a:t>Unity</a:t>
-            </a:r>
-            <a:r>
-              <a:rPr lang="ja-JP" altLang="en-US" sz="2400" dirty="0"/>
-              <a:t>プロジェクトフォルダを右クリックしてコミット画面を表示する</a:t>
-            </a:r>
-            <a:endParaRPr lang="en-US" altLang="ja-JP" sz="2400" dirty="0"/>
-          </a:p>
-          <a:p>
-            <a:r>
-              <a:rPr lang="ja-JP" altLang="en-US" sz="2400" dirty="0"/>
-              <a:t>４．画面下側に表示されたファイル群を全選択して</a:t>
-            </a:r>
-            <a:r>
-              <a:rPr lang="en-US" altLang="ja-JP" sz="2400" dirty="0"/>
-              <a:t>Git</a:t>
-            </a:r>
-            <a:r>
-              <a:rPr lang="ja-JP" altLang="en-US" sz="2400" dirty="0"/>
-              <a:t>に</a:t>
-            </a:r>
-            <a:r>
-              <a:rPr lang="en-US" altLang="ja-JP" sz="2400" dirty="0"/>
-              <a:t>Add</a:t>
-            </a:r>
-            <a:r>
-              <a:rPr lang="ja-JP" altLang="en-US" sz="2400" dirty="0"/>
-              <a:t>する</a:t>
-            </a:r>
-            <a:endParaRPr lang="en-US" altLang="ja-JP" sz="2400" dirty="0"/>
-          </a:p>
-          <a:p>
-            <a:r>
-              <a:rPr lang="ja-JP" altLang="en-US" sz="2400" dirty="0"/>
-              <a:t>５．コミットして</a:t>
-            </a:r>
-            <a:r>
-              <a:rPr lang="en-US" altLang="ja-JP" sz="2400" dirty="0"/>
-              <a:t>Push</a:t>
-            </a:r>
-            <a:r>
-              <a:rPr lang="ja-JP" altLang="en-US" sz="2400" dirty="0"/>
-              <a:t>する</a:t>
-            </a:r>
-            <a:endParaRPr lang="en-US" altLang="ja-JP" sz="2400" dirty="0"/>
-          </a:p>
-          <a:p>
-            <a:r>
-              <a:rPr lang="en-US" altLang="ja-JP" sz="2400" b="1" dirty="0">
-                <a:solidFill>
-                  <a:srgbClr val="FF0000"/>
-                </a:solidFill>
-              </a:rPr>
               <a:t>※</a:t>
             </a:r>
             <a:r>
-              <a:rPr lang="ja-JP" altLang="en-US" sz="2400" b="1" dirty="0">
-                <a:solidFill>
-                  <a:srgbClr val="FF0000"/>
-                </a:solidFill>
-              </a:rPr>
-              <a:t>コミット画面から</a:t>
-            </a:r>
-            <a:r>
-              <a:rPr lang="en-US" altLang="ja-JP" sz="2400" b="1" dirty="0">
-                <a:solidFill>
-                  <a:srgbClr val="FF0000"/>
-                </a:solidFill>
-              </a:rPr>
-              <a:t>Add</a:t>
-            </a:r>
-            <a:r>
-              <a:rPr lang="ja-JP" altLang="en-US" sz="2400" b="1" dirty="0">
-                <a:solidFill>
-                  <a:srgbClr val="FF0000"/>
-                </a:solidFill>
-              </a:rPr>
-              <a:t>しないと</a:t>
-            </a:r>
-            <a:r>
-              <a:rPr lang="en-US" altLang="ja-JP" sz="2400" b="1" dirty="0">
-                <a:solidFill>
-                  <a:srgbClr val="FF0000"/>
-                </a:solidFill>
-              </a:rPr>
-              <a:t>.</a:t>
-            </a:r>
-            <a:r>
-              <a:rPr lang="en-US" altLang="ja-JP" sz="2400" b="1" dirty="0" err="1">
-                <a:solidFill>
-                  <a:srgbClr val="FF0000"/>
-                </a:solidFill>
-              </a:rPr>
-              <a:t>gitignore</a:t>
-            </a:r>
-            <a:r>
-              <a:rPr lang="ja-JP" altLang="en-US" sz="2400" b="1" dirty="0">
-                <a:solidFill>
-                  <a:srgbClr val="FF0000"/>
-                </a:solidFill>
-              </a:rPr>
-              <a:t>対象のファイルまで</a:t>
-            </a:r>
-            <a:r>
-              <a:rPr lang="en-US" altLang="ja-JP" sz="2400" b="1" dirty="0">
-                <a:solidFill>
-                  <a:srgbClr val="FF0000"/>
-                </a:solidFill>
-              </a:rPr>
-              <a:t>Add</a:t>
-            </a:r>
-            <a:r>
-              <a:rPr lang="ja-JP" altLang="en-US" sz="2400" b="1" dirty="0">
-                <a:solidFill>
-                  <a:srgbClr val="FF0000"/>
-                </a:solidFill>
-              </a:rPr>
-              <a:t>します</a:t>
-            </a:r>
-            <a:endParaRPr lang="en-US" altLang="ja-JP" sz="2400" b="1" dirty="0">
-              <a:solidFill>
-                <a:srgbClr val="FF0000"/>
-              </a:solidFill>
-            </a:endParaRPr>
-          </a:p>
-          <a:p>
-            <a:endParaRPr lang="en-US" altLang="ja-JP" sz="2400" b="1" dirty="0">
-              <a:solidFill>
-                <a:srgbClr val="FF0000"/>
-              </a:solidFill>
-            </a:endParaRPr>
-          </a:p>
-          <a:p>
-            <a:r>
-              <a:rPr lang="ja-JP" altLang="en-US" sz="2400" dirty="0"/>
-              <a:t>他のメンバーは</a:t>
-            </a:r>
-            <a:r>
-              <a:rPr lang="en-US" altLang="ja-JP" sz="2400" dirty="0"/>
-              <a:t>Pull</a:t>
-            </a:r>
-            <a:r>
-              <a:rPr lang="ja-JP" altLang="en-US" sz="2400" dirty="0"/>
-              <a:t>してプロジェクトを追加しましょう。</a:t>
+              <a:rPr lang="ja-JP" altLang="en-US" sz="2400" dirty="0"/>
+              <a:t>いずれのシーンも画像を描画してるだけ</a:t>
             </a:r>
             <a:endParaRPr lang="en-US" altLang="ja-JP" sz="2400" dirty="0"/>
           </a:p>
@@ -3933,7 +3789,7 @@
     </p:spTree>
     <p:extLst>
       <p:ext uri="{BB962C8B-B14F-4D97-AF65-F5344CB8AC3E}">
-        <p14:creationId xmlns:p14="http://schemas.microsoft.com/office/powerpoint/2010/main" val="1918227059"/>
+        <p14:creationId xmlns:p14="http://schemas.microsoft.com/office/powerpoint/2010/main" val="2966075304"/>
       </p:ext>
     </p:extLst>
   </p:cSld>
@@ -4010,7 +3866,7 @@
         <p:spPr>
           <a:xfrm>
             <a:off x="567542" y="1216429"/>
-            <a:ext cx="8494633" cy="4893647"/>
+            <a:ext cx="4801314" cy="5632311"/>
           </a:xfrm>
           <a:prstGeom prst="rect">
             <a:avLst/>
@@ -4025,28 +3881,86 @@
           <a:p>
             <a:r>
               <a:rPr lang="ja-JP" altLang="en-US" sz="2400" dirty="0"/>
-              <a:t>以下のタスクを分担して実装してください。</a:t>
+              <a:t>以下のように作業分担しましょう</a:t>
             </a:r>
             <a:endParaRPr lang="en-US" altLang="ja-JP" sz="2400" dirty="0"/>
           </a:p>
           <a:p>
-            <a:r>
-              <a:rPr lang="ja-JP" altLang="en-US" sz="2400" dirty="0"/>
-              <a:t>ただし</a:t>
-            </a:r>
             <a:r>
               <a:rPr lang="ja-JP" altLang="en-US" sz="2400" b="1" dirty="0">
                 <a:solidFill>
                   <a:srgbClr val="FF0000"/>
                 </a:solidFill>
               </a:rPr>
-              <a:t>タスク２とタスク３は別々の人で作業してください。</a:t>
-            </a:r>
-            <a:endParaRPr lang="en-US" altLang="ja-JP" sz="2400" b="1" dirty="0">
-              <a:solidFill>
-                <a:srgbClr val="FF0000"/>
-              </a:solidFill>
-            </a:endParaRPr>
+              <a:t>■メンバー</a:t>
+            </a:r>
+            <a:r>
+              <a:rPr lang="en-US" altLang="ja-JP" sz="2400" b="1" dirty="0">
+                <a:solidFill>
+                  <a:srgbClr val="FF0000"/>
+                </a:solidFill>
+              </a:rPr>
+              <a:t>A</a:t>
+            </a:r>
+          </a:p>
+          <a:p>
+            <a:r>
+              <a:rPr lang="ja-JP" altLang="en-US" sz="2400" dirty="0"/>
+              <a:t>基盤＆タイトル画面作成</a:t>
+            </a:r>
+            <a:endParaRPr lang="en-US" altLang="ja-JP" sz="2400" dirty="0"/>
+          </a:p>
+          <a:p>
+            <a:r>
+              <a:rPr lang="ja-JP" altLang="en-US" sz="2400" dirty="0"/>
+              <a:t>・プロジェクト作成</a:t>
+            </a:r>
+            <a:endParaRPr lang="en-US" altLang="ja-JP" sz="2400" dirty="0"/>
+          </a:p>
+          <a:p>
+            <a:r>
+              <a:rPr lang="ja-JP" altLang="en-US" sz="2400" dirty="0"/>
+              <a:t>・</a:t>
+            </a:r>
+            <a:r>
+              <a:rPr lang="en-US" altLang="ja-JP" sz="2400" dirty="0"/>
+              <a:t>Main.cpp</a:t>
+            </a:r>
+            <a:r>
+              <a:rPr lang="ja-JP" altLang="en-US" sz="2400" dirty="0"/>
+              <a:t>作成</a:t>
+            </a:r>
+            <a:endParaRPr lang="en-US" altLang="ja-JP" sz="2400" dirty="0"/>
+          </a:p>
+          <a:p>
+            <a:r>
+              <a:rPr lang="ja-JP" altLang="en-US" sz="2400" dirty="0"/>
+              <a:t>・</a:t>
+            </a:r>
+            <a:r>
+              <a:rPr lang="en-US" altLang="ja-JP" sz="2400" dirty="0"/>
+              <a:t>SceneManager.cpp/.h</a:t>
+            </a:r>
+            <a:r>
+              <a:rPr lang="ja-JP" altLang="en-US" sz="2400" dirty="0"/>
+              <a:t>作成</a:t>
+            </a:r>
+            <a:endParaRPr lang="en-US" altLang="ja-JP" sz="2400" dirty="0"/>
+          </a:p>
+          <a:p>
+            <a:r>
+              <a:rPr lang="ja-JP" altLang="en-US" sz="2400" dirty="0"/>
+              <a:t>・</a:t>
+            </a:r>
+            <a:r>
+              <a:rPr lang="en-US" altLang="ja-JP" sz="2400" dirty="0"/>
+              <a:t>TitleScene.cpp/.h</a:t>
+            </a:r>
+            <a:r>
+              <a:rPr lang="ja-JP" altLang="en-US" sz="2400" dirty="0"/>
+              <a:t>作成</a:t>
+            </a:r>
+            <a:endParaRPr lang="en-US" altLang="ja-JP" sz="2400" dirty="0"/>
           </a:p>
           <a:p>
             <a:endParaRPr lang="en-US" altLang="ja-JP" sz="2400" dirty="0"/>
@@ -4055,153 +3969,135 @@
             <a:r>
               <a:rPr lang="ja-JP" altLang="en-US" sz="2400" b="1" dirty="0">
                 <a:solidFill>
-                  <a:srgbClr val="00B050"/>
+                  <a:srgbClr val="FF0000"/>
                 </a:solidFill>
               </a:rPr>
-              <a:t>タスク</a:t>
-            </a:r>
+              <a:t>■メンバー</a:t>
+            </a:r>
+            <a:r>
+              <a:rPr lang="en-US" altLang="ja-JP" sz="2400" b="1" dirty="0">
+                <a:solidFill>
+                  <a:srgbClr val="FF0000"/>
+                </a:solidFill>
+              </a:rPr>
+              <a:t>B</a:t>
+            </a:r>
+          </a:p>
+          <a:p>
+            <a:r>
+              <a:rPr lang="ja-JP" altLang="en-US" sz="2400" dirty="0"/>
+              <a:t>プレイ画面作成</a:t>
+            </a:r>
+            <a:endParaRPr lang="en-US" altLang="ja-JP" sz="2400" dirty="0"/>
+          </a:p>
+          <a:p>
+            <a:r>
+              <a:rPr lang="ja-JP" altLang="en-US" sz="2400" dirty="0"/>
+              <a:t>・</a:t>
+            </a:r>
+            <a:r>
+              <a:rPr lang="en-US" altLang="ja-JP" sz="2400" dirty="0"/>
+              <a:t>PlayScene.cpp/.h</a:t>
+            </a:r>
+            <a:r>
+              <a:rPr lang="ja-JP" altLang="en-US" sz="2400" dirty="0"/>
+              <a:t>作成</a:t>
+            </a:r>
+            <a:endParaRPr lang="en-US" altLang="ja-JP" sz="2400" dirty="0"/>
+          </a:p>
+          <a:p>
+            <a:endParaRPr lang="en-US" altLang="ja-JP" sz="2400" dirty="0"/>
+          </a:p>
+          <a:p>
+            <a:r>
+              <a:rPr lang="ja-JP" altLang="en-US" sz="2400" b="1" dirty="0">
+                <a:solidFill>
+                  <a:srgbClr val="FF0000"/>
+                </a:solidFill>
+              </a:rPr>
+              <a:t>■メンバー</a:t>
+            </a:r>
+            <a:r>
+              <a:rPr lang="en-US" altLang="ja-JP" sz="2400" b="1" dirty="0">
+                <a:solidFill>
+                  <a:srgbClr val="FF0000"/>
+                </a:solidFill>
+              </a:rPr>
+              <a:t>C</a:t>
+            </a:r>
+          </a:p>
+          <a:p>
+            <a:r>
+              <a:rPr lang="ja-JP" altLang="en-US" sz="2400" dirty="0"/>
+              <a:t>オプション画面作成</a:t>
+            </a:r>
+            <a:endParaRPr lang="en-US" altLang="ja-JP" sz="2400" dirty="0"/>
+          </a:p>
+          <a:p>
+            <a:r>
+              <a:rPr lang="ja-JP" altLang="en-US" sz="2400" dirty="0"/>
+              <a:t>・</a:t>
+            </a:r>
+            <a:r>
+              <a:rPr lang="en-US" altLang="ja-JP" sz="2400" dirty="0"/>
+              <a:t>OptionScene.cpp/.h</a:t>
+            </a:r>
+            <a:r>
+              <a:rPr lang="ja-JP" altLang="en-US" sz="2400" dirty="0"/>
+              <a:t>作成</a:t>
+            </a:r>
+            <a:endParaRPr lang="en-US" altLang="ja-JP" sz="2400" dirty="0"/>
+          </a:p>
+        </p:txBody>
+      </p:sp>
+      <p:sp>
+        <p:nvSpPr>
+          <p:cNvPr id="5" name="テキスト ボックス 4">
+            <a:extLst>
+              <a:ext uri="{FF2B5EF4-FFF2-40B4-BE49-F238E27FC236}">
+                <a16:creationId xmlns:a16="http://schemas.microsoft.com/office/drawing/2014/main" id="{8DE2F6DE-E224-4D68-A61A-322E32649F19}"/>
+              </a:ext>
+            </a:extLst>
+          </p:cNvPr>
+          <p:cNvSpPr txBox="1"/>
+          <p:nvPr/>
+        </p:nvSpPr>
+        <p:spPr>
+          <a:xfrm>
+            <a:off x="5939194" y="5319656"/>
+            <a:ext cx="5109091" cy="1200329"/>
+          </a:xfrm>
+          <a:prstGeom prst="rect">
+            <a:avLst/>
+          </a:prstGeom>
+          <a:noFill/>
+        </p:spPr>
+        <p:txBody>
+          <a:bodyPr wrap="none" rtlCol="0">
+            <a:spAutoFit/>
+          </a:bodyPr>
+          <a:lstStyle/>
+          <a:p>
             <a:r>
               <a:rPr lang="en-US" altLang="ja-JP" sz="2400" b="1" dirty="0">
                 <a:solidFill>
                   <a:srgbClr val="00B050"/>
                 </a:solidFill>
               </a:rPr>
-              <a:t>1</a:t>
-            </a:r>
-            <a:r>
-              <a:rPr lang="ja-JP" altLang="en-US" sz="2400" dirty="0"/>
-              <a:t>：シーン作成</a:t>
+              <a:t>MEMO</a:t>
+            </a:r>
+          </a:p>
+          <a:p>
+            <a:r>
+              <a:rPr lang="ja-JP" altLang="en-US" sz="2400" dirty="0"/>
+              <a:t>他に必要なファイルがある場合は</a:t>
             </a:r>
             <a:endParaRPr lang="en-US" altLang="ja-JP" sz="2400" dirty="0"/>
           </a:p>
           <a:p>
             <a:r>
               <a:rPr lang="ja-JP" altLang="en-US" sz="2400" dirty="0"/>
-              <a:t>　・</a:t>
-            </a:r>
-            <a:r>
-              <a:rPr lang="en-US" altLang="ja-JP" sz="2400" dirty="0"/>
-              <a:t>Play</a:t>
-            </a:r>
-            <a:r>
-              <a:rPr lang="ja-JP" altLang="en-US" sz="2400" dirty="0"/>
-              <a:t>シーン作成</a:t>
-            </a:r>
-            <a:endParaRPr lang="en-US" altLang="ja-JP" sz="2400" dirty="0"/>
-          </a:p>
-          <a:p>
-            <a:r>
-              <a:rPr lang="ja-JP" altLang="en-US" sz="2400" dirty="0"/>
-              <a:t>　・</a:t>
-            </a:r>
-            <a:r>
-              <a:rPr lang="en-US" altLang="ja-JP" sz="2400" dirty="0"/>
-              <a:t>Play</a:t>
-            </a:r>
-            <a:r>
-              <a:rPr lang="ja-JP" altLang="en-US" sz="2400" dirty="0"/>
-              <a:t>シーンを</a:t>
-            </a:r>
-            <a:r>
-              <a:rPr lang="en-US" altLang="ja-JP" sz="2400" dirty="0"/>
-              <a:t>Build Setting</a:t>
-            </a:r>
-            <a:r>
-              <a:rPr lang="ja-JP" altLang="en-US" sz="2400" dirty="0"/>
-              <a:t>に追加</a:t>
-            </a:r>
-            <a:endParaRPr lang="en-US" altLang="ja-JP" sz="2400" dirty="0"/>
-          </a:p>
-          <a:p>
-            <a:r>
-              <a:rPr lang="ja-JP" altLang="en-US" sz="2400" dirty="0"/>
-              <a:t>　・</a:t>
-            </a:r>
-            <a:r>
-              <a:rPr lang="en-US" altLang="ja-JP" sz="2400" dirty="0" err="1"/>
-              <a:t>Plyaer</a:t>
-            </a:r>
-            <a:r>
-              <a:rPr lang="ja-JP" altLang="en-US" sz="2400" dirty="0"/>
-              <a:t>が歩く床をシーンに配置</a:t>
-            </a:r>
-            <a:endParaRPr lang="en-US" altLang="ja-JP" sz="2400" dirty="0"/>
-          </a:p>
-          <a:p>
-            <a:endParaRPr lang="en-US" altLang="ja-JP" sz="2400" dirty="0"/>
-          </a:p>
-          <a:p>
-            <a:r>
-              <a:rPr lang="ja-JP" altLang="en-US" sz="2400" b="1" dirty="0">
-                <a:solidFill>
-                  <a:srgbClr val="00B050"/>
-                </a:solidFill>
-              </a:rPr>
-              <a:t>タスク</a:t>
-            </a:r>
-            <a:r>
-              <a:rPr lang="en-US" altLang="ja-JP" sz="2400" b="1" dirty="0">
-                <a:solidFill>
-                  <a:srgbClr val="00B050"/>
-                </a:solidFill>
-              </a:rPr>
-              <a:t>2</a:t>
-            </a:r>
-            <a:r>
-              <a:rPr lang="ja-JP" altLang="en-US" sz="2400" dirty="0"/>
-              <a:t>：プレイヤー作成</a:t>
-            </a:r>
-            <a:endParaRPr lang="en-US" altLang="ja-JP" sz="2400" dirty="0"/>
-          </a:p>
-          <a:p>
-            <a:r>
-              <a:rPr lang="ja-JP" altLang="en-US" sz="2400" dirty="0"/>
-              <a:t>　・プレイヤーの</a:t>
-            </a:r>
-            <a:r>
-              <a:rPr lang="en-US" altLang="ja-JP" sz="2400" dirty="0"/>
-              <a:t>Prefab</a:t>
-            </a:r>
-            <a:r>
-              <a:rPr lang="ja-JP" altLang="en-US" sz="2400" dirty="0"/>
-              <a:t>を作成</a:t>
-            </a:r>
-            <a:endParaRPr lang="en-US" altLang="ja-JP" sz="2400" dirty="0"/>
-          </a:p>
-          <a:p>
-            <a:r>
-              <a:rPr lang="ja-JP" altLang="en-US" sz="2400" dirty="0"/>
-              <a:t>　・プレイヤーをシーンに配置</a:t>
-            </a:r>
-            <a:endParaRPr lang="en-US" altLang="ja-JP" sz="2400" dirty="0"/>
-          </a:p>
-          <a:p>
-            <a:r>
-              <a:rPr lang="ja-JP" altLang="en-US" sz="2400" dirty="0"/>
-              <a:t>　・</a:t>
-            </a:r>
-            <a:r>
-              <a:rPr lang="en-US" altLang="ja-JP" sz="2400" dirty="0" err="1"/>
-              <a:t>Player.cs</a:t>
-            </a:r>
-            <a:r>
-              <a:rPr lang="ja-JP" altLang="en-US" sz="2400" dirty="0"/>
-              <a:t>追加</a:t>
-            </a:r>
-            <a:endParaRPr lang="en-US" altLang="ja-JP" sz="2400" dirty="0"/>
-          </a:p>
-          <a:p>
-            <a:r>
-              <a:rPr lang="ja-JP" altLang="en-US" sz="2400" dirty="0"/>
-              <a:t>　・カーソルキーで移動、</a:t>
-            </a:r>
-            <a:r>
-              <a:rPr lang="en-US" altLang="ja-JP" sz="2400" dirty="0"/>
-              <a:t>Z</a:t>
-            </a:r>
-            <a:r>
-              <a:rPr lang="ja-JP" altLang="en-US" sz="2400" dirty="0"/>
-              <a:t>キーでジャンプする処理を作成</a:t>
+              <a:t>相談しながら誰かが対応しましょう</a:t>
             </a:r>
             <a:endParaRPr lang="en-US" altLang="ja-JP" sz="2400" dirty="0"/>
           </a:p>
@@ -4210,7 +4106,7 @@
     </p:spTree>
     <p:extLst>
       <p:ext uri="{BB962C8B-B14F-4D97-AF65-F5344CB8AC3E}">
-        <p14:creationId xmlns:p14="http://schemas.microsoft.com/office/powerpoint/2010/main" val="410028988"/>
+        <p14:creationId xmlns:p14="http://schemas.microsoft.com/office/powerpoint/2010/main" val="3652496391"/>
       </p:ext>
     </p:extLst>
   </p:cSld>
@@ -4287,7 +4183,7 @@
         <p:spPr>
           <a:xfrm>
             <a:off x="567542" y="1216429"/>
-            <a:ext cx="8494633" cy="4154984"/>
+            <a:ext cx="10969670" cy="4154984"/>
           </a:xfrm>
           <a:prstGeom prst="rect">
             <a:avLst/>
@@ -4302,554 +4198,162 @@
           <a:p>
             <a:r>
               <a:rPr lang="ja-JP" altLang="en-US" sz="2400" dirty="0"/>
-              <a:t>以下のタスクを分担して実装してください。</a:t>
+              <a:t>作業するに当たって</a:t>
             </a:r>
             <a:endParaRPr lang="en-US" altLang="ja-JP" sz="2400" dirty="0"/>
           </a:p>
           <a:p>
             <a:r>
               <a:rPr lang="ja-JP" altLang="en-US" sz="2400" dirty="0"/>
-              <a:t>ただし</a:t>
-            </a:r>
-            <a:r>
-              <a:rPr lang="ja-JP" altLang="en-US" sz="2400" b="1" dirty="0">
-                <a:solidFill>
-                  <a:srgbClr val="FF0000"/>
-                </a:solidFill>
-              </a:rPr>
-              <a:t>タスク２とタスク３は別々の人で作業してください。</a:t>
-            </a:r>
-            <a:endParaRPr lang="en-US" altLang="ja-JP" sz="2400" b="1" dirty="0">
-              <a:solidFill>
-                <a:srgbClr val="FF0000"/>
-              </a:solidFill>
-            </a:endParaRPr>
-          </a:p>
-          <a:p>
+              <a:t>・ファイルを追加した際は</a:t>
+            </a:r>
+            <a:r>
+              <a:rPr lang="en-US" altLang="ja-JP" sz="2400" dirty="0"/>
+              <a:t>Add</a:t>
+            </a:r>
+            <a:r>
+              <a:rPr lang="ja-JP" altLang="en-US" sz="2400" dirty="0"/>
+              <a:t>を忘れないよう</a:t>
+            </a:r>
+            <a:r>
+              <a:rPr lang="ja-JP" altLang="en-US" sz="2400"/>
+              <a:t>にしましょう</a:t>
+            </a:r>
             <a:endParaRPr lang="en-US" altLang="ja-JP" sz="2400" dirty="0"/>
           </a:p>
           <a:p>
             <a:r>
-              <a:rPr lang="ja-JP" altLang="en-US" sz="2400" b="1" dirty="0">
-                <a:solidFill>
-                  <a:srgbClr val="00B050"/>
-                </a:solidFill>
-              </a:rPr>
-              <a:t>タスク</a:t>
-            </a:r>
-            <a:r>
-              <a:rPr lang="en-US" altLang="ja-JP" sz="2400" b="1" dirty="0">
-                <a:solidFill>
-                  <a:srgbClr val="00B050"/>
-                </a:solidFill>
-              </a:rPr>
-              <a:t>3</a:t>
-            </a:r>
-            <a:r>
-              <a:rPr lang="ja-JP" altLang="en-US" sz="2400" dirty="0"/>
-              <a:t>：バレット作成</a:t>
+              <a:rPr lang="ja-JP" altLang="en-US" sz="2400" dirty="0"/>
+              <a:t>・こまめに</a:t>
+            </a:r>
+            <a:r>
+              <a:rPr lang="en-US" altLang="ja-JP" sz="2400" dirty="0" err="1"/>
+              <a:t>Commit,Push,Pull</a:t>
+            </a:r>
+            <a:r>
+              <a:rPr lang="ja-JP" altLang="en-US" sz="2400" dirty="0"/>
+              <a:t>することを心がけましょう</a:t>
             </a:r>
             <a:endParaRPr lang="en-US" altLang="ja-JP" sz="2400" dirty="0"/>
           </a:p>
           <a:p>
             <a:r>
               <a:rPr lang="ja-JP" altLang="en-US" sz="2400" dirty="0"/>
-              <a:t>　・バレットの</a:t>
+              <a:t>・特に</a:t>
             </a:r>
             <a:r>
               <a:rPr lang="en-US" altLang="ja-JP" sz="2400" dirty="0"/>
-              <a:t>Prefab</a:t>
-            </a:r>
-            <a:r>
-              <a:rPr lang="ja-JP" altLang="en-US" sz="2400" dirty="0"/>
-              <a:t>を作成</a:t>
+              <a:t>Commit</a:t>
+            </a:r>
+            <a:r>
+              <a:rPr lang="ja-JP" altLang="en-US" sz="2400" dirty="0"/>
+              <a:t>はセーブポイントとなります。こまめにやりましょう</a:t>
             </a:r>
             <a:endParaRPr lang="en-US" altLang="ja-JP" sz="2400" dirty="0"/>
           </a:p>
           <a:p>
             <a:r>
               <a:rPr lang="ja-JP" altLang="en-US" sz="2400" dirty="0"/>
-              <a:t>　・</a:t>
+              <a:t>・</a:t>
             </a:r>
             <a:r>
               <a:rPr lang="en-US" altLang="ja-JP" sz="2400" dirty="0" err="1"/>
-              <a:t>Bullet.cs</a:t>
-            </a:r>
-            <a:r>
-              <a:rPr lang="ja-JP" altLang="en-US" sz="2400" dirty="0"/>
-              <a:t>作成</a:t>
+              <a:t>SceneManager</a:t>
+            </a:r>
+            <a:r>
+              <a:rPr lang="ja-JP" altLang="en-US" sz="2400" dirty="0"/>
+              <a:t>はいろんな人が書き換える可能性があるので注意しましょう</a:t>
             </a:r>
             <a:endParaRPr lang="en-US" altLang="ja-JP" sz="2400" dirty="0"/>
           </a:p>
           <a:p>
             <a:r>
               <a:rPr lang="ja-JP" altLang="en-US" sz="2400" dirty="0"/>
-              <a:t>　・バレットが前進する処理を作成</a:t>
+              <a:t>・困ったことがあればチームメンバーに相談しましょう</a:t>
             </a:r>
             <a:endParaRPr lang="en-US" altLang="ja-JP" sz="2400" dirty="0"/>
           </a:p>
           <a:p>
             <a:r>
               <a:rPr lang="ja-JP" altLang="en-US" sz="2400" dirty="0"/>
-              <a:t>　・</a:t>
+              <a:t>・画像素材はサンプルのものをそのまま使って大丈夫です</a:t>
+            </a:r>
+            <a:endParaRPr lang="en-US" altLang="ja-JP" sz="2400" dirty="0"/>
+          </a:p>
+          <a:p>
+            <a:r>
+              <a:rPr lang="ja-JP" altLang="en-US" sz="2400" dirty="0"/>
+              <a:t>・これまで作ってきたプログラムを使いまわしても大丈夫です</a:t>
+            </a:r>
+            <a:endParaRPr lang="en-US" altLang="ja-JP" sz="2400" dirty="0"/>
+          </a:p>
+          <a:p>
+            <a:r>
+              <a:rPr lang="ja-JP" altLang="en-US" sz="2400" dirty="0"/>
+              <a:t>・</a:t>
             </a:r>
             <a:r>
               <a:rPr lang="en-US" altLang="ja-JP" sz="2400" dirty="0"/>
-              <a:t>X</a:t>
-            </a:r>
-            <a:r>
-              <a:rPr lang="ja-JP" altLang="en-US" sz="2400" dirty="0"/>
-              <a:t>キーでバレットを発射する処理を作成</a:t>
+              <a:t>4</a:t>
+            </a:r>
+            <a:r>
+              <a:rPr lang="ja-JP" altLang="en-US" sz="2400" dirty="0"/>
+              <a:t>人以上のチームは</a:t>
+            </a:r>
+            <a:r>
+              <a:rPr lang="en-US" altLang="ja-JP" sz="2400" dirty="0"/>
+              <a:t>Title, Play, Option </a:t>
+            </a:r>
+            <a:r>
+              <a:rPr lang="ja-JP" altLang="en-US" sz="2400" dirty="0"/>
+              <a:t>以外のシーンを人数分作ってください</a:t>
             </a:r>
             <a:endParaRPr lang="en-US" altLang="ja-JP" sz="2400" dirty="0"/>
           </a:p>
           <a:p>
+            <a:r>
+              <a:rPr lang="ja-JP" altLang="en-US" sz="2400" dirty="0"/>
+              <a:t>　各シーン同様、画像を複数表示し、</a:t>
+            </a:r>
+            <a:r>
+              <a:rPr lang="en-US" altLang="ja-JP" sz="2400" dirty="0"/>
+              <a:t>C</a:t>
+            </a:r>
+            <a:r>
+              <a:rPr lang="ja-JP" altLang="en-US" sz="2400" dirty="0"/>
+              <a:t>キーで</a:t>
+            </a:r>
+            <a:r>
+              <a:rPr lang="en-US" altLang="ja-JP" sz="2400" dirty="0"/>
+              <a:t>Title</a:t>
+            </a:r>
+            <a:r>
+              <a:rPr lang="ja-JP" altLang="en-US" sz="2400" dirty="0"/>
+              <a:t>に戻れば大丈夫です。</a:t>
+            </a:r>
             <a:endParaRPr lang="en-US" altLang="ja-JP" sz="2400" dirty="0"/>
           </a:p>
           <a:p>
             <a:r>
-              <a:rPr lang="en-US" altLang="ja-JP" sz="2400" b="1" dirty="0">
-                <a:solidFill>
-                  <a:srgbClr val="FF0000"/>
-                </a:solidFill>
-              </a:rPr>
+              <a:rPr lang="ja-JP" altLang="en-US" sz="2400" dirty="0"/>
+              <a:t>　</a:t>
+            </a:r>
+            <a:r>
+              <a:rPr lang="en-US" altLang="ja-JP" sz="2400" dirty="0"/>
               <a:t>※</a:t>
             </a:r>
             <a:r>
-              <a:rPr lang="ja-JP" altLang="en-US" sz="2400" b="1" dirty="0">
-                <a:solidFill>
-                  <a:srgbClr val="FF0000"/>
-                </a:solidFill>
-              </a:rPr>
-              <a:t>スライドに書いていない作業は誰が担当しても良いです。</a:t>
-            </a:r>
-            <a:endParaRPr lang="en-US" altLang="ja-JP" sz="2400" b="1" dirty="0">
-              <a:solidFill>
-                <a:srgbClr val="FF0000"/>
-              </a:solidFill>
-            </a:endParaRPr>
-          </a:p>
-          <a:p>
-            <a:r>
-              <a:rPr lang="en-US" altLang="ja-JP" sz="2400" b="1" dirty="0">
-                <a:solidFill>
-                  <a:srgbClr val="FF0000"/>
-                </a:solidFill>
-              </a:rPr>
-              <a:t>※</a:t>
-            </a:r>
-            <a:r>
-              <a:rPr lang="ja-JP" altLang="en-US" sz="2400" b="1" dirty="0">
-                <a:solidFill>
-                  <a:srgbClr val="FF0000"/>
-                </a:solidFill>
-              </a:rPr>
-              <a:t>４人以上のチームは次ページ以降のものも実装しましょう</a:t>
-            </a:r>
-            <a:endParaRPr lang="en-US" altLang="ja-JP" sz="2400" b="1" dirty="0">
-              <a:solidFill>
-                <a:srgbClr val="FF0000"/>
-              </a:solidFill>
-            </a:endParaRPr>
+              <a:rPr lang="ja-JP" altLang="en-US" sz="2400" dirty="0"/>
+              <a:t>背景以外の画像は新しいものを用意してください</a:t>
+            </a:r>
+            <a:endParaRPr lang="en-US" altLang="ja-JP" sz="2400" dirty="0"/>
           </a:p>
         </p:txBody>
       </p:sp>
     </p:spTree>
     <p:extLst>
       <p:ext uri="{BB962C8B-B14F-4D97-AF65-F5344CB8AC3E}">
-        <p14:creationId xmlns:p14="http://schemas.microsoft.com/office/powerpoint/2010/main" val="739803981"/>
-      </p:ext>
-    </p:extLst>
-  </p:cSld>
-  <p:clrMapOvr>
-    <a:masterClrMapping/>
-  </p:clrMapOvr>
-</p:sld>
-</file>
-
-<file path=ppt/slides/slide4.xml><?xml version="1.0" encoding="utf-8"?>
-<p:sld xmlns:a="http://schemas.openxmlformats.org/drawingml/2006/main" xmlns:r="http://schemas.openxmlformats.org/officeDocument/2006/relationships" xmlns:p="http://schemas.openxmlformats.org/presentationml/2006/main">
-  <p:cSld>
-    <p:spTree>
-      <p:nvGrpSpPr>
-        <p:cNvPr id="1" name=""/>
-        <p:cNvGrpSpPr/>
-        <p:nvPr/>
-      </p:nvGrpSpPr>
-      <p:grpSpPr>
-        <a:xfrm>
-          <a:off x="0" y="0"/>
-          <a:ext cx="0" cy="0"/>
-          <a:chOff x="0" y="0"/>
-          <a:chExt cx="0" cy="0"/>
-        </a:xfrm>
-      </p:grpSpPr>
-      <p:sp>
-        <p:nvSpPr>
-          <p:cNvPr id="4" name="テキスト ボックス 3">
-            <a:extLst>
-              <a:ext uri="{FF2B5EF4-FFF2-40B4-BE49-F238E27FC236}">
-                <a16:creationId xmlns:a16="http://schemas.microsoft.com/office/drawing/2014/main" id="{5A13BF46-B8C5-48AA-8308-C9ECFF431A18}"/>
-              </a:ext>
-            </a:extLst>
-          </p:cNvPr>
-          <p:cNvSpPr txBox="1"/>
-          <p:nvPr/>
-        </p:nvSpPr>
-        <p:spPr>
-          <a:xfrm>
-            <a:off x="567542" y="491954"/>
-            <a:ext cx="1005403" cy="584775"/>
-          </a:xfrm>
-          <a:prstGeom prst="rect">
-            <a:avLst/>
-          </a:prstGeom>
-          <a:noFill/>
-        </p:spPr>
-        <p:txBody>
-          <a:bodyPr wrap="none" rtlCol="0">
-            <a:spAutoFit/>
-          </a:bodyPr>
-          <a:lstStyle/>
-          <a:p>
-            <a:r>
-              <a:rPr kumimoji="1" lang="ja-JP" altLang="en-US" sz="3200" b="1" u="sng" dirty="0"/>
-              <a:t>課題</a:t>
-            </a:r>
-          </a:p>
-        </p:txBody>
-      </p:sp>
-      <p:sp>
-        <p:nvSpPr>
-          <p:cNvPr id="6" name="テキスト ボックス 5">
-            <a:extLst>
-              <a:ext uri="{FF2B5EF4-FFF2-40B4-BE49-F238E27FC236}">
-                <a16:creationId xmlns:a16="http://schemas.microsoft.com/office/drawing/2014/main" id="{55830AD6-028B-4C4E-80BF-B70DFC1C3A46}"/>
-              </a:ext>
-            </a:extLst>
-          </p:cNvPr>
-          <p:cNvSpPr txBox="1"/>
-          <p:nvPr/>
-        </p:nvSpPr>
-        <p:spPr>
-          <a:xfrm>
-            <a:off x="567542" y="1216429"/>
-            <a:ext cx="6955750" cy="4524315"/>
-          </a:xfrm>
-          <a:prstGeom prst="rect">
-            <a:avLst/>
-          </a:prstGeom>
-          <a:noFill/>
-        </p:spPr>
-        <p:txBody>
-          <a:bodyPr wrap="none" rtlCol="0">
-            <a:spAutoFit/>
-          </a:bodyPr>
-          <a:lstStyle/>
-          <a:p>
-            <a:r>
-              <a:rPr lang="ja-JP" altLang="en-US" sz="2400" dirty="0"/>
-              <a:t>以下は余裕のあるチームは取り組んでください。</a:t>
-            </a:r>
-            <a:endParaRPr lang="en-US" altLang="ja-JP" sz="2400" dirty="0"/>
-          </a:p>
-          <a:p>
-            <a:endParaRPr lang="en-US" altLang="ja-JP" sz="2400" b="1" dirty="0">
-              <a:solidFill>
-                <a:srgbClr val="FF0000"/>
-              </a:solidFill>
-            </a:endParaRPr>
-          </a:p>
-          <a:p>
-            <a:r>
-              <a:rPr lang="en-US" altLang="ja-JP" sz="2400" b="1" dirty="0">
-                <a:solidFill>
-                  <a:srgbClr val="00B050"/>
-                </a:solidFill>
-              </a:rPr>
-              <a:t>EX</a:t>
-            </a:r>
-            <a:r>
-              <a:rPr lang="ja-JP" altLang="en-US" sz="2400" b="1" dirty="0">
-                <a:solidFill>
-                  <a:srgbClr val="00B050"/>
-                </a:solidFill>
-              </a:rPr>
-              <a:t>タスク</a:t>
-            </a:r>
-            <a:r>
-              <a:rPr lang="en-US" altLang="ja-JP" sz="2400" b="1" dirty="0">
-                <a:solidFill>
-                  <a:srgbClr val="00B050"/>
-                </a:solidFill>
-              </a:rPr>
-              <a:t>1</a:t>
-            </a:r>
-            <a:r>
-              <a:rPr lang="ja-JP" altLang="en-US" sz="2400" dirty="0"/>
-              <a:t>：エネミー作成</a:t>
-            </a:r>
-            <a:endParaRPr lang="en-US" altLang="ja-JP" sz="2400" dirty="0"/>
-          </a:p>
-          <a:p>
-            <a:r>
-              <a:rPr lang="ja-JP" altLang="en-US" sz="2400" dirty="0"/>
-              <a:t>　・エネミーの</a:t>
-            </a:r>
-            <a:r>
-              <a:rPr lang="en-US" altLang="ja-JP" sz="2400" dirty="0"/>
-              <a:t>Prefab</a:t>
-            </a:r>
-            <a:r>
-              <a:rPr lang="ja-JP" altLang="en-US" sz="2400" dirty="0"/>
-              <a:t>を作成</a:t>
-            </a:r>
-            <a:endParaRPr lang="en-US" altLang="ja-JP" sz="2400" dirty="0"/>
-          </a:p>
-          <a:p>
-            <a:r>
-              <a:rPr lang="ja-JP" altLang="en-US" sz="2400" dirty="0"/>
-              <a:t>　・</a:t>
-            </a:r>
-            <a:r>
-              <a:rPr lang="en-US" altLang="ja-JP" sz="2400" dirty="0" err="1"/>
-              <a:t>Enemy.cs</a:t>
-            </a:r>
-            <a:r>
-              <a:rPr lang="ja-JP" altLang="en-US" sz="2400" dirty="0"/>
-              <a:t>を作成</a:t>
-            </a:r>
-            <a:endParaRPr lang="en-US" altLang="ja-JP" sz="2400" dirty="0"/>
-          </a:p>
-          <a:p>
-            <a:r>
-              <a:rPr lang="ja-JP" altLang="en-US" sz="2400" dirty="0"/>
-              <a:t>　・エネミーの処理を適当に作成</a:t>
-            </a:r>
-            <a:endParaRPr lang="en-US" altLang="ja-JP" sz="2400" dirty="0"/>
-          </a:p>
-          <a:p>
-            <a:r>
-              <a:rPr lang="ja-JP" altLang="en-US" sz="2400" dirty="0"/>
-              <a:t>　・エネミーをシーンに配置</a:t>
-            </a:r>
-            <a:endParaRPr lang="en-US" altLang="ja-JP" sz="2400" dirty="0"/>
-          </a:p>
-          <a:p>
-            <a:endParaRPr lang="en-US" altLang="ja-JP" sz="2400" dirty="0"/>
-          </a:p>
-          <a:p>
-            <a:r>
-              <a:rPr lang="en-US" altLang="ja-JP" sz="2400" b="1" dirty="0">
-                <a:solidFill>
-                  <a:srgbClr val="00B050"/>
-                </a:solidFill>
-              </a:rPr>
-              <a:t>EX</a:t>
-            </a:r>
-            <a:r>
-              <a:rPr lang="ja-JP" altLang="en-US" sz="2400" b="1" dirty="0">
-                <a:solidFill>
-                  <a:srgbClr val="00B050"/>
-                </a:solidFill>
-              </a:rPr>
-              <a:t>タスク</a:t>
-            </a:r>
-            <a:r>
-              <a:rPr lang="en-US" altLang="ja-JP" sz="2400" b="1" dirty="0">
-                <a:solidFill>
-                  <a:srgbClr val="00B050"/>
-                </a:solidFill>
-              </a:rPr>
-              <a:t>2</a:t>
-            </a:r>
-            <a:r>
-              <a:rPr lang="ja-JP" altLang="en-US" sz="2400" dirty="0"/>
-              <a:t>：スコアの実装</a:t>
-            </a:r>
-            <a:endParaRPr lang="en-US" altLang="ja-JP" sz="2400" dirty="0"/>
-          </a:p>
-          <a:p>
-            <a:r>
-              <a:rPr lang="ja-JP" altLang="en-US" sz="2400" dirty="0"/>
-              <a:t>　・エネミーを射撃して倒せるようにする</a:t>
-            </a:r>
-            <a:endParaRPr lang="en-US" altLang="ja-JP" sz="2400" dirty="0"/>
-          </a:p>
-          <a:p>
-            <a:r>
-              <a:rPr lang="ja-JP" altLang="en-US" sz="2400" dirty="0"/>
-              <a:t>　・エネミーを倒すとスコアが加算される</a:t>
-            </a:r>
-            <a:endParaRPr lang="en-US" altLang="ja-JP" sz="2400" dirty="0"/>
-          </a:p>
-          <a:p>
-            <a:r>
-              <a:rPr lang="ja-JP" altLang="en-US" sz="2400" dirty="0"/>
-              <a:t>　・スコアを画面に表示する</a:t>
-            </a:r>
-            <a:endParaRPr lang="en-US" altLang="ja-JP" sz="2400" dirty="0"/>
-          </a:p>
-        </p:txBody>
-      </p:sp>
-    </p:spTree>
-    <p:extLst>
-      <p:ext uri="{BB962C8B-B14F-4D97-AF65-F5344CB8AC3E}">
-        <p14:creationId xmlns:p14="http://schemas.microsoft.com/office/powerpoint/2010/main" val="1381235754"/>
-      </p:ext>
-    </p:extLst>
-  </p:cSld>
-  <p:clrMapOvr>
-    <a:masterClrMapping/>
-  </p:clrMapOvr>
-</p:sld>
-</file>
-
-<file path=ppt/slides/slide5.xml><?xml version="1.0" encoding="utf-8"?>
-<p:sld xmlns:a="http://schemas.openxmlformats.org/drawingml/2006/main" xmlns:r="http://schemas.openxmlformats.org/officeDocument/2006/relationships" xmlns:p="http://schemas.openxmlformats.org/presentationml/2006/main">
-  <p:cSld>
-    <p:spTree>
-      <p:nvGrpSpPr>
-        <p:cNvPr id="1" name=""/>
-        <p:cNvGrpSpPr/>
-        <p:nvPr/>
-      </p:nvGrpSpPr>
-      <p:grpSpPr>
-        <a:xfrm>
-          <a:off x="0" y="0"/>
-          <a:ext cx="0" cy="0"/>
-          <a:chOff x="0" y="0"/>
-          <a:chExt cx="0" cy="0"/>
-        </a:xfrm>
-      </p:grpSpPr>
-      <p:sp>
-        <p:nvSpPr>
-          <p:cNvPr id="4" name="テキスト ボックス 3">
-            <a:extLst>
-              <a:ext uri="{FF2B5EF4-FFF2-40B4-BE49-F238E27FC236}">
-                <a16:creationId xmlns:a16="http://schemas.microsoft.com/office/drawing/2014/main" id="{5A13BF46-B8C5-48AA-8308-C9ECFF431A18}"/>
-              </a:ext>
-            </a:extLst>
-          </p:cNvPr>
-          <p:cNvSpPr txBox="1"/>
-          <p:nvPr/>
-        </p:nvSpPr>
-        <p:spPr>
-          <a:xfrm>
-            <a:off x="567542" y="491954"/>
-            <a:ext cx="2763898" cy="584775"/>
-          </a:xfrm>
-          <a:prstGeom prst="rect">
-            <a:avLst/>
-          </a:prstGeom>
-          <a:noFill/>
-        </p:spPr>
-        <p:txBody>
-          <a:bodyPr wrap="none" rtlCol="0">
-            <a:spAutoFit/>
-          </a:bodyPr>
-          <a:lstStyle/>
-          <a:p>
-            <a:r>
-              <a:rPr kumimoji="1" lang="ja-JP" altLang="en-US" sz="3200" b="1" u="sng" dirty="0"/>
-              <a:t>課題 注意事項</a:t>
-            </a:r>
-          </a:p>
-        </p:txBody>
-      </p:sp>
-      <p:sp>
-        <p:nvSpPr>
-          <p:cNvPr id="6" name="テキスト ボックス 5">
-            <a:extLst>
-              <a:ext uri="{FF2B5EF4-FFF2-40B4-BE49-F238E27FC236}">
-                <a16:creationId xmlns:a16="http://schemas.microsoft.com/office/drawing/2014/main" id="{55830AD6-028B-4C4E-80BF-B70DFC1C3A46}"/>
-              </a:ext>
-            </a:extLst>
-          </p:cNvPr>
-          <p:cNvSpPr txBox="1"/>
-          <p:nvPr/>
-        </p:nvSpPr>
-        <p:spPr>
-          <a:xfrm>
-            <a:off x="567542" y="1216429"/>
-            <a:ext cx="8723863" cy="1569660"/>
-          </a:xfrm>
-          <a:prstGeom prst="rect">
-            <a:avLst/>
-          </a:prstGeom>
-          <a:noFill/>
-        </p:spPr>
-        <p:txBody>
-          <a:bodyPr wrap="none" rtlCol="0">
-            <a:spAutoFit/>
-          </a:bodyPr>
-          <a:lstStyle/>
-          <a:p>
-            <a:r>
-              <a:rPr lang="ja-JP" altLang="en-US" sz="2400" dirty="0"/>
-              <a:t>課題は実行ファイルと、</a:t>
-            </a:r>
-            <a:r>
-              <a:rPr lang="en-US" altLang="ja-JP" sz="2400" dirty="0"/>
-              <a:t>Bitbucket</a:t>
-            </a:r>
-            <a:r>
-              <a:rPr lang="ja-JP" altLang="en-US" sz="2400" dirty="0"/>
-              <a:t>で確認します。</a:t>
-            </a:r>
-            <a:endParaRPr lang="en-US" altLang="ja-JP" sz="2400" dirty="0"/>
-          </a:p>
-          <a:p>
-            <a:r>
-              <a:rPr lang="ja-JP" altLang="en-US" sz="2400" b="1" dirty="0">
-                <a:solidFill>
-                  <a:srgbClr val="FF0000"/>
-                </a:solidFill>
-              </a:rPr>
-              <a:t>作業した分は必ず</a:t>
-            </a:r>
-            <a:r>
-              <a:rPr lang="en-US" altLang="ja-JP" sz="2400" b="1" dirty="0">
-                <a:solidFill>
-                  <a:srgbClr val="FF0000"/>
-                </a:solidFill>
-              </a:rPr>
-              <a:t>Push</a:t>
-            </a:r>
-            <a:r>
-              <a:rPr lang="ja-JP" altLang="en-US" sz="2400" dirty="0"/>
-              <a:t>しましょう。</a:t>
-            </a:r>
-            <a:endParaRPr lang="en-US" altLang="ja-JP" sz="2400" dirty="0"/>
-          </a:p>
-          <a:p>
-            <a:endParaRPr lang="en-US" altLang="ja-JP" sz="2400" dirty="0"/>
-          </a:p>
-          <a:p>
-            <a:r>
-              <a:rPr lang="en-US" altLang="ja-JP" sz="2400" dirty="0"/>
-              <a:t>※Push</a:t>
-            </a:r>
-            <a:r>
-              <a:rPr lang="ja-JP" altLang="en-US" sz="2400" dirty="0"/>
-              <a:t>を忘れると</a:t>
-            </a:r>
-            <a:r>
-              <a:rPr lang="en-US" altLang="ja-JP" sz="2400" dirty="0"/>
-              <a:t>Bitbucket</a:t>
-            </a:r>
-            <a:r>
-              <a:rPr lang="ja-JP" altLang="en-US" sz="2400" dirty="0"/>
-              <a:t>に反映されず、評価できません。</a:t>
-            </a:r>
-            <a:endParaRPr lang="en-US" altLang="ja-JP" sz="2400" dirty="0"/>
-          </a:p>
-        </p:txBody>
-      </p:sp>
-    </p:spTree>
-    <p:extLst>
-      <p:ext uri="{BB962C8B-B14F-4D97-AF65-F5344CB8AC3E}">
-        <p14:creationId xmlns:p14="http://schemas.microsoft.com/office/powerpoint/2010/main" val="2617904529"/>
+        <p14:creationId xmlns:p14="http://schemas.microsoft.com/office/powerpoint/2010/main" val="252754637"/>
       </p:ext>
     </p:extLst>
   </p:cSld>
